--- a/testcases/text-fakebold-width.pptx
+++ b/testcases/text-fakebold-width.pptx
@@ -129,7 +129,7 @@
           <p:cNvPr id="2" name="标题 1">
             <a:extLst>
               <a:ext uri="{FF2B5EF4-FFF2-40B4-BE49-F238E27FC236}">
-                <a16:creationId xmlns:a16="http://schemas.microsoft.com/office/drawing/2014/main" id="{3A482008-12FE-6791-7797-E886E722C034}"/>
+                <a16:creationId xmlns:a16="http://schemas.microsoft.com/office/drawing/2014/main" id="{4CFBC15B-725F-9284-E6DB-FD8D21463B9E}"/>
               </a:ext>
             </a:extLst>
           </p:cNvPr>
@@ -166,7 +166,7 @@
           <p:cNvPr id="3" name="副标题 2">
             <a:extLst>
               <a:ext uri="{FF2B5EF4-FFF2-40B4-BE49-F238E27FC236}">
-                <a16:creationId xmlns:a16="http://schemas.microsoft.com/office/drawing/2014/main" id="{B6DEEA89-4D2D-6C5B-DA34-B0100A4492D1}"/>
+                <a16:creationId xmlns:a16="http://schemas.microsoft.com/office/drawing/2014/main" id="{7690B39A-9A80-4BB7-0049-7ECDF346E5E5}"/>
               </a:ext>
             </a:extLst>
           </p:cNvPr>
@@ -236,7 +236,7 @@
           <p:cNvPr id="4" name="日期占位符 3">
             <a:extLst>
               <a:ext uri="{FF2B5EF4-FFF2-40B4-BE49-F238E27FC236}">
-                <a16:creationId xmlns:a16="http://schemas.microsoft.com/office/drawing/2014/main" id="{EC25F376-ABC8-F247-2894-43CF93EEDF98}"/>
+                <a16:creationId xmlns:a16="http://schemas.microsoft.com/office/drawing/2014/main" id="{DC82E864-B0DA-30E3-BE9E-92718A2FBE75}"/>
               </a:ext>
             </a:extLst>
           </p:cNvPr>
@@ -252,7 +252,7 @@
           <a:bodyPr/>
           <a:lstStyle/>
           <a:p>
-            <a:fld id="{EE768BC6-7C59-4AF9-9A9C-16808A684B20}" type="datetimeFigureOut">
+            <a:fld id="{2B01452E-83BA-4816-98B4-7F90BFDFB752}" type="datetimeFigureOut">
               <a:rPr lang="zh-CN" altLang="en-US" smtClean="0"/>
               <a:t>2026/10/17</a:t>
             </a:fld>
@@ -265,7 +265,7 @@
           <p:cNvPr id="5" name="页脚占位符 4">
             <a:extLst>
               <a:ext uri="{FF2B5EF4-FFF2-40B4-BE49-F238E27FC236}">
-                <a16:creationId xmlns:a16="http://schemas.microsoft.com/office/drawing/2014/main" id="{17CE727C-BC63-C74F-A25E-1C80EC67356E}"/>
+                <a16:creationId xmlns:a16="http://schemas.microsoft.com/office/drawing/2014/main" id="{EC069F5E-5DCD-1BFF-CE4A-9F095598D11A}"/>
               </a:ext>
             </a:extLst>
           </p:cNvPr>
@@ -290,7 +290,7 @@
           <p:cNvPr id="6" name="灯片编号占位符 5">
             <a:extLst>
               <a:ext uri="{FF2B5EF4-FFF2-40B4-BE49-F238E27FC236}">
-                <a16:creationId xmlns:a16="http://schemas.microsoft.com/office/drawing/2014/main" id="{F3A83E07-45E5-6832-AF1A-52D7BE1C8CC9}"/>
+                <a16:creationId xmlns:a16="http://schemas.microsoft.com/office/drawing/2014/main" id="{66A3FAC0-B703-F4A6-4C69-490C38EC4827}"/>
               </a:ext>
             </a:extLst>
           </p:cNvPr>
@@ -306,7 +306,7 @@
           <a:bodyPr/>
           <a:lstStyle/>
           <a:p>
-            <a:fld id="{1717AF0A-DFD1-4466-9FEF-6F1D9B97B9BC}" type="slidenum">
+            <a:fld id="{8F723D4E-C5B0-4F6F-A012-F7303B3A5CF2}" type="slidenum">
               <a:rPr lang="zh-CN" altLang="en-US" smtClean="0"/>
               <a:t>‹#›</a:t>
             </a:fld>
@@ -317,7 +317,7 @@
     </p:spTree>
     <p:extLst>
       <p:ext uri="{BB962C8B-B14F-4D97-AF65-F5344CB8AC3E}">
-        <p14:creationId xmlns:p14="http://schemas.microsoft.com/office/powerpoint/2010/main" val="382717055"/>
+        <p14:creationId xmlns:p14="http://schemas.microsoft.com/office/powerpoint/2010/main" val="2994646290"/>
       </p:ext>
     </p:extLst>
   </p:cSld>
@@ -349,7 +349,7 @@
           <p:cNvPr id="2" name="标题 1">
             <a:extLst>
               <a:ext uri="{FF2B5EF4-FFF2-40B4-BE49-F238E27FC236}">
-                <a16:creationId xmlns:a16="http://schemas.microsoft.com/office/drawing/2014/main" id="{994D54A3-0090-29EA-43E6-01FDA75B87BA}"/>
+                <a16:creationId xmlns:a16="http://schemas.microsoft.com/office/drawing/2014/main" id="{3E635BDC-B542-A52A-FCE2-567538FE1652}"/>
               </a:ext>
             </a:extLst>
           </p:cNvPr>
@@ -377,7 +377,7 @@
           <p:cNvPr id="3" name="竖排文字占位符 2">
             <a:extLst>
               <a:ext uri="{FF2B5EF4-FFF2-40B4-BE49-F238E27FC236}">
-                <a16:creationId xmlns:a16="http://schemas.microsoft.com/office/drawing/2014/main" id="{C773822E-DAC1-4D4A-B6F8-9CFEC185ED52}"/>
+                <a16:creationId xmlns:a16="http://schemas.microsoft.com/office/drawing/2014/main" id="{9D82699C-A1CE-0435-974D-DF332B918268}"/>
               </a:ext>
             </a:extLst>
           </p:cNvPr>
@@ -434,7 +434,7 @@
           <p:cNvPr id="4" name="日期占位符 3">
             <a:extLst>
               <a:ext uri="{FF2B5EF4-FFF2-40B4-BE49-F238E27FC236}">
-                <a16:creationId xmlns:a16="http://schemas.microsoft.com/office/drawing/2014/main" id="{C81B99F7-F93C-1AC5-8654-E9FD2958EDFD}"/>
+                <a16:creationId xmlns:a16="http://schemas.microsoft.com/office/drawing/2014/main" id="{374103CB-36D3-9680-3E55-62B32FC931B9}"/>
               </a:ext>
             </a:extLst>
           </p:cNvPr>
@@ -450,7 +450,7 @@
           <a:bodyPr/>
           <a:lstStyle/>
           <a:p>
-            <a:fld id="{EE768BC6-7C59-4AF9-9A9C-16808A684B20}" type="datetimeFigureOut">
+            <a:fld id="{2B01452E-83BA-4816-98B4-7F90BFDFB752}" type="datetimeFigureOut">
               <a:rPr lang="zh-CN" altLang="en-US" smtClean="0"/>
               <a:t>2026/10/17</a:t>
             </a:fld>
@@ -463,7 +463,7 @@
           <p:cNvPr id="5" name="页脚占位符 4">
             <a:extLst>
               <a:ext uri="{FF2B5EF4-FFF2-40B4-BE49-F238E27FC236}">
-                <a16:creationId xmlns:a16="http://schemas.microsoft.com/office/drawing/2014/main" id="{2969B77D-F12E-D1DA-E9DA-68B1E4BF8290}"/>
+                <a16:creationId xmlns:a16="http://schemas.microsoft.com/office/drawing/2014/main" id="{A9C92008-5155-F0BC-0DB7-863633508A26}"/>
               </a:ext>
             </a:extLst>
           </p:cNvPr>
@@ -488,7 +488,7 @@
           <p:cNvPr id="6" name="灯片编号占位符 5">
             <a:extLst>
               <a:ext uri="{FF2B5EF4-FFF2-40B4-BE49-F238E27FC236}">
-                <a16:creationId xmlns:a16="http://schemas.microsoft.com/office/drawing/2014/main" id="{CF054382-E683-4022-C683-F82357BBB09D}"/>
+                <a16:creationId xmlns:a16="http://schemas.microsoft.com/office/drawing/2014/main" id="{82B246A5-ABF5-3839-EAC8-EEDB988A047F}"/>
               </a:ext>
             </a:extLst>
           </p:cNvPr>
@@ -504,7 +504,7 @@
           <a:bodyPr/>
           <a:lstStyle/>
           <a:p>
-            <a:fld id="{1717AF0A-DFD1-4466-9FEF-6F1D9B97B9BC}" type="slidenum">
+            <a:fld id="{8F723D4E-C5B0-4F6F-A012-F7303B3A5CF2}" type="slidenum">
               <a:rPr lang="zh-CN" altLang="en-US" smtClean="0"/>
               <a:t>‹#›</a:t>
             </a:fld>
@@ -515,7 +515,7 @@
     </p:spTree>
     <p:extLst>
       <p:ext uri="{BB962C8B-B14F-4D97-AF65-F5344CB8AC3E}">
-        <p14:creationId xmlns:p14="http://schemas.microsoft.com/office/powerpoint/2010/main" val="3943671173"/>
+        <p14:creationId xmlns:p14="http://schemas.microsoft.com/office/powerpoint/2010/main" val="188744828"/>
       </p:ext>
     </p:extLst>
   </p:cSld>
@@ -547,7 +547,7 @@
           <p:cNvPr id="2" name="竖排标题 1">
             <a:extLst>
               <a:ext uri="{FF2B5EF4-FFF2-40B4-BE49-F238E27FC236}">
-                <a16:creationId xmlns:a16="http://schemas.microsoft.com/office/drawing/2014/main" id="{A41AAE18-64CE-701B-62F3-B87F045E285D}"/>
+                <a16:creationId xmlns:a16="http://schemas.microsoft.com/office/drawing/2014/main" id="{75BCA662-3A1B-440D-48ED-4CA66B56C183}"/>
               </a:ext>
             </a:extLst>
           </p:cNvPr>
@@ -580,7 +580,7 @@
           <p:cNvPr id="3" name="竖排文字占位符 2">
             <a:extLst>
               <a:ext uri="{FF2B5EF4-FFF2-40B4-BE49-F238E27FC236}">
-                <a16:creationId xmlns:a16="http://schemas.microsoft.com/office/drawing/2014/main" id="{F25E70C7-CE28-02F1-36AD-D4B3A16444AE}"/>
+                <a16:creationId xmlns:a16="http://schemas.microsoft.com/office/drawing/2014/main" id="{F3E37692-81B0-38D4-A2DF-658270D40BBE}"/>
               </a:ext>
             </a:extLst>
           </p:cNvPr>
@@ -642,7 +642,7 @@
           <p:cNvPr id="4" name="日期占位符 3">
             <a:extLst>
               <a:ext uri="{FF2B5EF4-FFF2-40B4-BE49-F238E27FC236}">
-                <a16:creationId xmlns:a16="http://schemas.microsoft.com/office/drawing/2014/main" id="{F403C5AA-ABA2-863E-BDCF-90529766946F}"/>
+                <a16:creationId xmlns:a16="http://schemas.microsoft.com/office/drawing/2014/main" id="{AF63F282-E2CA-CC59-1B2B-6A2A9D0D260A}"/>
               </a:ext>
             </a:extLst>
           </p:cNvPr>
@@ -658,7 +658,7 @@
           <a:bodyPr/>
           <a:lstStyle/>
           <a:p>
-            <a:fld id="{EE768BC6-7C59-4AF9-9A9C-16808A684B20}" type="datetimeFigureOut">
+            <a:fld id="{2B01452E-83BA-4816-98B4-7F90BFDFB752}" type="datetimeFigureOut">
               <a:rPr lang="zh-CN" altLang="en-US" smtClean="0"/>
               <a:t>2026/10/17</a:t>
             </a:fld>
@@ -671,7 +671,7 @@
           <p:cNvPr id="5" name="页脚占位符 4">
             <a:extLst>
               <a:ext uri="{FF2B5EF4-FFF2-40B4-BE49-F238E27FC236}">
-                <a16:creationId xmlns:a16="http://schemas.microsoft.com/office/drawing/2014/main" id="{EB58DF63-C352-E6DA-678C-FFFD2B384EDA}"/>
+                <a16:creationId xmlns:a16="http://schemas.microsoft.com/office/drawing/2014/main" id="{227D22A5-FF17-25E6-DAE5-1250D9A22DD5}"/>
               </a:ext>
             </a:extLst>
           </p:cNvPr>
@@ -696,7 +696,7 @@
           <p:cNvPr id="6" name="灯片编号占位符 5">
             <a:extLst>
               <a:ext uri="{FF2B5EF4-FFF2-40B4-BE49-F238E27FC236}">
-                <a16:creationId xmlns:a16="http://schemas.microsoft.com/office/drawing/2014/main" id="{246C0D34-49B7-5AA9-774B-31096651B7A2}"/>
+                <a16:creationId xmlns:a16="http://schemas.microsoft.com/office/drawing/2014/main" id="{69E838EB-596C-0589-F02D-44203D23B2F7}"/>
               </a:ext>
             </a:extLst>
           </p:cNvPr>
@@ -712,7 +712,7 @@
           <a:bodyPr/>
           <a:lstStyle/>
           <a:p>
-            <a:fld id="{1717AF0A-DFD1-4466-9FEF-6F1D9B97B9BC}" type="slidenum">
+            <a:fld id="{8F723D4E-C5B0-4F6F-A012-F7303B3A5CF2}" type="slidenum">
               <a:rPr lang="zh-CN" altLang="en-US" smtClean="0"/>
               <a:t>‹#›</a:t>
             </a:fld>
@@ -723,7 +723,7 @@
     </p:spTree>
     <p:extLst>
       <p:ext uri="{BB962C8B-B14F-4D97-AF65-F5344CB8AC3E}">
-        <p14:creationId xmlns:p14="http://schemas.microsoft.com/office/powerpoint/2010/main" val="3700311700"/>
+        <p14:creationId xmlns:p14="http://schemas.microsoft.com/office/powerpoint/2010/main" val="1325928961"/>
       </p:ext>
     </p:extLst>
   </p:cSld>
@@ -755,7 +755,7 @@
           <p:cNvPr id="2" name="标题 1">
             <a:extLst>
               <a:ext uri="{FF2B5EF4-FFF2-40B4-BE49-F238E27FC236}">
-                <a16:creationId xmlns:a16="http://schemas.microsoft.com/office/drawing/2014/main" id="{02503095-07CE-70E4-A448-4AD350C9F075}"/>
+                <a16:creationId xmlns:a16="http://schemas.microsoft.com/office/drawing/2014/main" id="{60834756-B640-79E4-BAB7-1C7E5E31F1ED}"/>
               </a:ext>
             </a:extLst>
           </p:cNvPr>
@@ -783,7 +783,7 @@
           <p:cNvPr id="3" name="内容占位符 2">
             <a:extLst>
               <a:ext uri="{FF2B5EF4-FFF2-40B4-BE49-F238E27FC236}">
-                <a16:creationId xmlns:a16="http://schemas.microsoft.com/office/drawing/2014/main" id="{5E827875-F0EA-2861-56D6-8545A7615B33}"/>
+                <a16:creationId xmlns:a16="http://schemas.microsoft.com/office/drawing/2014/main" id="{CEA2E03B-3A62-F910-778B-AB4BAE9EDF14}"/>
               </a:ext>
             </a:extLst>
           </p:cNvPr>
@@ -840,7 +840,7 @@
           <p:cNvPr id="4" name="日期占位符 3">
             <a:extLst>
               <a:ext uri="{FF2B5EF4-FFF2-40B4-BE49-F238E27FC236}">
-                <a16:creationId xmlns:a16="http://schemas.microsoft.com/office/drawing/2014/main" id="{B90A6007-F7E3-1563-C04C-C5992DB9759D}"/>
+                <a16:creationId xmlns:a16="http://schemas.microsoft.com/office/drawing/2014/main" id="{C2CCDA7A-6003-79D0-2B67-FC87E50913E6}"/>
               </a:ext>
             </a:extLst>
           </p:cNvPr>
@@ -856,7 +856,7 @@
           <a:bodyPr/>
           <a:lstStyle/>
           <a:p>
-            <a:fld id="{EE768BC6-7C59-4AF9-9A9C-16808A684B20}" type="datetimeFigureOut">
+            <a:fld id="{2B01452E-83BA-4816-98B4-7F90BFDFB752}" type="datetimeFigureOut">
               <a:rPr lang="zh-CN" altLang="en-US" smtClean="0"/>
               <a:t>2026/10/17</a:t>
             </a:fld>
@@ -869,7 +869,7 @@
           <p:cNvPr id="5" name="页脚占位符 4">
             <a:extLst>
               <a:ext uri="{FF2B5EF4-FFF2-40B4-BE49-F238E27FC236}">
-                <a16:creationId xmlns:a16="http://schemas.microsoft.com/office/drawing/2014/main" id="{3A484ACB-FD13-6E45-36D6-7A83B3585FD8}"/>
+                <a16:creationId xmlns:a16="http://schemas.microsoft.com/office/drawing/2014/main" id="{9AC7FF42-0E4C-0413-C762-E647D25C6FF2}"/>
               </a:ext>
             </a:extLst>
           </p:cNvPr>
@@ -894,7 +894,7 @@
           <p:cNvPr id="6" name="灯片编号占位符 5">
             <a:extLst>
               <a:ext uri="{FF2B5EF4-FFF2-40B4-BE49-F238E27FC236}">
-                <a16:creationId xmlns:a16="http://schemas.microsoft.com/office/drawing/2014/main" id="{EA323F6B-F2BE-AE36-12EB-111AB82DA08D}"/>
+                <a16:creationId xmlns:a16="http://schemas.microsoft.com/office/drawing/2014/main" id="{FA6A994D-E95E-6848-44AC-D74A1B7C696A}"/>
               </a:ext>
             </a:extLst>
           </p:cNvPr>
@@ -910,7 +910,7 @@
           <a:bodyPr/>
           <a:lstStyle/>
           <a:p>
-            <a:fld id="{1717AF0A-DFD1-4466-9FEF-6F1D9B97B9BC}" type="slidenum">
+            <a:fld id="{8F723D4E-C5B0-4F6F-A012-F7303B3A5CF2}" type="slidenum">
               <a:rPr lang="zh-CN" altLang="en-US" smtClean="0"/>
               <a:t>‹#›</a:t>
             </a:fld>
@@ -921,7 +921,7 @@
     </p:spTree>
     <p:extLst>
       <p:ext uri="{BB962C8B-B14F-4D97-AF65-F5344CB8AC3E}">
-        <p14:creationId xmlns:p14="http://schemas.microsoft.com/office/powerpoint/2010/main" val="3084473737"/>
+        <p14:creationId xmlns:p14="http://schemas.microsoft.com/office/powerpoint/2010/main" val="365908705"/>
       </p:ext>
     </p:extLst>
   </p:cSld>
@@ -953,7 +953,7 @@
           <p:cNvPr id="2" name="标题 1">
             <a:extLst>
               <a:ext uri="{FF2B5EF4-FFF2-40B4-BE49-F238E27FC236}">
-                <a16:creationId xmlns:a16="http://schemas.microsoft.com/office/drawing/2014/main" id="{C65C4D90-295B-4D21-DB57-4662C9AF19FE}"/>
+                <a16:creationId xmlns:a16="http://schemas.microsoft.com/office/drawing/2014/main" id="{97352A4E-4960-2A25-0E9A-8CA3FE31BE6B}"/>
               </a:ext>
             </a:extLst>
           </p:cNvPr>
@@ -990,7 +990,7 @@
           <p:cNvPr id="3" name="文本占位符 2">
             <a:extLst>
               <a:ext uri="{FF2B5EF4-FFF2-40B4-BE49-F238E27FC236}">
-                <a16:creationId xmlns:a16="http://schemas.microsoft.com/office/drawing/2014/main" id="{A8483B00-3871-D730-7603-6B9FA00BA75C}"/>
+                <a16:creationId xmlns:a16="http://schemas.microsoft.com/office/drawing/2014/main" id="{7967822D-8EC4-78DE-D41E-4D6691B79FF0}"/>
               </a:ext>
             </a:extLst>
           </p:cNvPr>
@@ -1115,7 +1115,7 @@
           <p:cNvPr id="4" name="日期占位符 3">
             <a:extLst>
               <a:ext uri="{FF2B5EF4-FFF2-40B4-BE49-F238E27FC236}">
-                <a16:creationId xmlns:a16="http://schemas.microsoft.com/office/drawing/2014/main" id="{CB2FF5DD-2219-83BF-A541-133A5F8C812E}"/>
+                <a16:creationId xmlns:a16="http://schemas.microsoft.com/office/drawing/2014/main" id="{9F0EBA5A-C52A-B0AA-F61D-E73C37721449}"/>
               </a:ext>
             </a:extLst>
           </p:cNvPr>
@@ -1131,7 +1131,7 @@
           <a:bodyPr/>
           <a:lstStyle/>
           <a:p>
-            <a:fld id="{EE768BC6-7C59-4AF9-9A9C-16808A684B20}" type="datetimeFigureOut">
+            <a:fld id="{2B01452E-83BA-4816-98B4-7F90BFDFB752}" type="datetimeFigureOut">
               <a:rPr lang="zh-CN" altLang="en-US" smtClean="0"/>
               <a:t>2026/10/17</a:t>
             </a:fld>
@@ -1144,7 +1144,7 @@
           <p:cNvPr id="5" name="页脚占位符 4">
             <a:extLst>
               <a:ext uri="{FF2B5EF4-FFF2-40B4-BE49-F238E27FC236}">
-                <a16:creationId xmlns:a16="http://schemas.microsoft.com/office/drawing/2014/main" id="{6EE4A6E5-5A80-CA09-FB74-5666616455A7}"/>
+                <a16:creationId xmlns:a16="http://schemas.microsoft.com/office/drawing/2014/main" id="{AE3427D4-3EE9-700F-B736-1E60740BD1C1}"/>
               </a:ext>
             </a:extLst>
           </p:cNvPr>
@@ -1169,7 +1169,7 @@
           <p:cNvPr id="6" name="灯片编号占位符 5">
             <a:extLst>
               <a:ext uri="{FF2B5EF4-FFF2-40B4-BE49-F238E27FC236}">
-                <a16:creationId xmlns:a16="http://schemas.microsoft.com/office/drawing/2014/main" id="{C212970D-6001-4776-5D9A-6E99F4DD5B4A}"/>
+                <a16:creationId xmlns:a16="http://schemas.microsoft.com/office/drawing/2014/main" id="{A4AA5B3E-D9A2-606A-64BD-9457E75583CA}"/>
               </a:ext>
             </a:extLst>
           </p:cNvPr>
@@ -1185,7 +1185,7 @@
           <a:bodyPr/>
           <a:lstStyle/>
           <a:p>
-            <a:fld id="{1717AF0A-DFD1-4466-9FEF-6F1D9B97B9BC}" type="slidenum">
+            <a:fld id="{8F723D4E-C5B0-4F6F-A012-F7303B3A5CF2}" type="slidenum">
               <a:rPr lang="zh-CN" altLang="en-US" smtClean="0"/>
               <a:t>‹#›</a:t>
             </a:fld>
@@ -1196,7 +1196,7 @@
     </p:spTree>
     <p:extLst>
       <p:ext uri="{BB962C8B-B14F-4D97-AF65-F5344CB8AC3E}">
-        <p14:creationId xmlns:p14="http://schemas.microsoft.com/office/powerpoint/2010/main" val="451016923"/>
+        <p14:creationId xmlns:p14="http://schemas.microsoft.com/office/powerpoint/2010/main" val="1406162017"/>
       </p:ext>
     </p:extLst>
   </p:cSld>
@@ -1228,7 +1228,7 @@
           <p:cNvPr id="2" name="标题 1">
             <a:extLst>
               <a:ext uri="{FF2B5EF4-FFF2-40B4-BE49-F238E27FC236}">
-                <a16:creationId xmlns:a16="http://schemas.microsoft.com/office/drawing/2014/main" id="{DD8463FF-01DF-A06A-0206-22C55C7B224D}"/>
+                <a16:creationId xmlns:a16="http://schemas.microsoft.com/office/drawing/2014/main" id="{B274B358-5774-7E99-8295-24C858C5079C}"/>
               </a:ext>
             </a:extLst>
           </p:cNvPr>
@@ -1256,7 +1256,7 @@
           <p:cNvPr id="3" name="内容占位符 2">
             <a:extLst>
               <a:ext uri="{FF2B5EF4-FFF2-40B4-BE49-F238E27FC236}">
-                <a16:creationId xmlns:a16="http://schemas.microsoft.com/office/drawing/2014/main" id="{479BB39C-2318-A259-71CB-159745248A64}"/>
+                <a16:creationId xmlns:a16="http://schemas.microsoft.com/office/drawing/2014/main" id="{DC0E6C0C-D6FD-EA42-47EA-C39774897315}"/>
               </a:ext>
             </a:extLst>
           </p:cNvPr>
@@ -1318,7 +1318,7 @@
           <p:cNvPr id="4" name="内容占位符 3">
             <a:extLst>
               <a:ext uri="{FF2B5EF4-FFF2-40B4-BE49-F238E27FC236}">
-                <a16:creationId xmlns:a16="http://schemas.microsoft.com/office/drawing/2014/main" id="{2340C813-A16D-9166-31F3-311562C969C1}"/>
+                <a16:creationId xmlns:a16="http://schemas.microsoft.com/office/drawing/2014/main" id="{6159E1DB-659D-711B-BE44-A9A018A4B0AC}"/>
               </a:ext>
             </a:extLst>
           </p:cNvPr>
@@ -1380,7 +1380,7 @@
           <p:cNvPr id="5" name="日期占位符 4">
             <a:extLst>
               <a:ext uri="{FF2B5EF4-FFF2-40B4-BE49-F238E27FC236}">
-                <a16:creationId xmlns:a16="http://schemas.microsoft.com/office/drawing/2014/main" id="{15D312D2-C449-C0B8-389D-25E6B8E2D1A9}"/>
+                <a16:creationId xmlns:a16="http://schemas.microsoft.com/office/drawing/2014/main" id="{C5AA684E-88F3-5844-B5A0-5BF6672FB9EF}"/>
               </a:ext>
             </a:extLst>
           </p:cNvPr>
@@ -1396,7 +1396,7 @@
           <a:bodyPr/>
           <a:lstStyle/>
           <a:p>
-            <a:fld id="{EE768BC6-7C59-4AF9-9A9C-16808A684B20}" type="datetimeFigureOut">
+            <a:fld id="{2B01452E-83BA-4816-98B4-7F90BFDFB752}" type="datetimeFigureOut">
               <a:rPr lang="zh-CN" altLang="en-US" smtClean="0"/>
               <a:t>2026/10/17</a:t>
             </a:fld>
@@ -1409,7 +1409,7 @@
           <p:cNvPr id="6" name="页脚占位符 5">
             <a:extLst>
               <a:ext uri="{FF2B5EF4-FFF2-40B4-BE49-F238E27FC236}">
-                <a16:creationId xmlns:a16="http://schemas.microsoft.com/office/drawing/2014/main" id="{5F27A4D5-0886-0C71-CB22-52D2D319ED97}"/>
+                <a16:creationId xmlns:a16="http://schemas.microsoft.com/office/drawing/2014/main" id="{5D0A8715-EAC0-C92C-BC19-973FA80ED9CC}"/>
               </a:ext>
             </a:extLst>
           </p:cNvPr>
@@ -1434,7 +1434,7 @@
           <p:cNvPr id="7" name="灯片编号占位符 6">
             <a:extLst>
               <a:ext uri="{FF2B5EF4-FFF2-40B4-BE49-F238E27FC236}">
-                <a16:creationId xmlns:a16="http://schemas.microsoft.com/office/drawing/2014/main" id="{B8CC59BD-45AF-E8DE-0894-4C39695DA167}"/>
+                <a16:creationId xmlns:a16="http://schemas.microsoft.com/office/drawing/2014/main" id="{E9DBEB76-9C24-968D-9DED-901F83DA1034}"/>
               </a:ext>
             </a:extLst>
           </p:cNvPr>
@@ -1450,7 +1450,7 @@
           <a:bodyPr/>
           <a:lstStyle/>
           <a:p>
-            <a:fld id="{1717AF0A-DFD1-4466-9FEF-6F1D9B97B9BC}" type="slidenum">
+            <a:fld id="{8F723D4E-C5B0-4F6F-A012-F7303B3A5CF2}" type="slidenum">
               <a:rPr lang="zh-CN" altLang="en-US" smtClean="0"/>
               <a:t>‹#›</a:t>
             </a:fld>
@@ -1461,7 +1461,7 @@
     </p:spTree>
     <p:extLst>
       <p:ext uri="{BB962C8B-B14F-4D97-AF65-F5344CB8AC3E}">
-        <p14:creationId xmlns:p14="http://schemas.microsoft.com/office/powerpoint/2010/main" val="2582031131"/>
+        <p14:creationId xmlns:p14="http://schemas.microsoft.com/office/powerpoint/2010/main" val="3617900073"/>
       </p:ext>
     </p:extLst>
   </p:cSld>
@@ -1493,7 +1493,7 @@
           <p:cNvPr id="2" name="标题 1">
             <a:extLst>
               <a:ext uri="{FF2B5EF4-FFF2-40B4-BE49-F238E27FC236}">
-                <a16:creationId xmlns:a16="http://schemas.microsoft.com/office/drawing/2014/main" id="{D824708D-32A4-B5CC-3984-F6CA8AFC3539}"/>
+                <a16:creationId xmlns:a16="http://schemas.microsoft.com/office/drawing/2014/main" id="{9A335295-22B5-120E-EAB6-DD2F00BE9C72}"/>
               </a:ext>
             </a:extLst>
           </p:cNvPr>
@@ -1526,7 +1526,7 @@
           <p:cNvPr id="3" name="文本占位符 2">
             <a:extLst>
               <a:ext uri="{FF2B5EF4-FFF2-40B4-BE49-F238E27FC236}">
-                <a16:creationId xmlns:a16="http://schemas.microsoft.com/office/drawing/2014/main" id="{33328901-4686-5927-E3DB-740EAE0B596B}"/>
+                <a16:creationId xmlns:a16="http://schemas.microsoft.com/office/drawing/2014/main" id="{486163FE-49FE-7A24-2788-63F1B07850A6}"/>
               </a:ext>
             </a:extLst>
           </p:cNvPr>
@@ -1597,7 +1597,7 @@
           <p:cNvPr id="4" name="内容占位符 3">
             <a:extLst>
               <a:ext uri="{FF2B5EF4-FFF2-40B4-BE49-F238E27FC236}">
-                <a16:creationId xmlns:a16="http://schemas.microsoft.com/office/drawing/2014/main" id="{14198973-813A-46F7-ED26-0D19B8D1EB08}"/>
+                <a16:creationId xmlns:a16="http://schemas.microsoft.com/office/drawing/2014/main" id="{54408840-4749-BDC1-E366-D697C39B5938}"/>
               </a:ext>
             </a:extLst>
           </p:cNvPr>
@@ -1659,7 +1659,7 @@
           <p:cNvPr id="5" name="文本占位符 4">
             <a:extLst>
               <a:ext uri="{FF2B5EF4-FFF2-40B4-BE49-F238E27FC236}">
-                <a16:creationId xmlns:a16="http://schemas.microsoft.com/office/drawing/2014/main" id="{27821421-BD06-08AE-BC4A-8F44988375BC}"/>
+                <a16:creationId xmlns:a16="http://schemas.microsoft.com/office/drawing/2014/main" id="{4A43D59F-B104-3EB1-B49B-EF84A68D801D}"/>
               </a:ext>
             </a:extLst>
           </p:cNvPr>
@@ -1730,7 +1730,7 @@
           <p:cNvPr id="6" name="内容占位符 5">
             <a:extLst>
               <a:ext uri="{FF2B5EF4-FFF2-40B4-BE49-F238E27FC236}">
-                <a16:creationId xmlns:a16="http://schemas.microsoft.com/office/drawing/2014/main" id="{947A209B-A5DC-E974-13E2-4BAA94516BD0}"/>
+                <a16:creationId xmlns:a16="http://schemas.microsoft.com/office/drawing/2014/main" id="{D4A7284B-BE47-5A8B-9C2E-0A8BA769665F}"/>
               </a:ext>
             </a:extLst>
           </p:cNvPr>
@@ -1792,7 +1792,7 @@
           <p:cNvPr id="7" name="日期占位符 6">
             <a:extLst>
               <a:ext uri="{FF2B5EF4-FFF2-40B4-BE49-F238E27FC236}">
-                <a16:creationId xmlns:a16="http://schemas.microsoft.com/office/drawing/2014/main" id="{AFBDEA2F-B076-E8F2-3A98-2816F0BB2721}"/>
+                <a16:creationId xmlns:a16="http://schemas.microsoft.com/office/drawing/2014/main" id="{2D15545E-2AFC-D22C-9D63-778C11FB222C}"/>
               </a:ext>
             </a:extLst>
           </p:cNvPr>
@@ -1808,7 +1808,7 @@
           <a:bodyPr/>
           <a:lstStyle/>
           <a:p>
-            <a:fld id="{EE768BC6-7C59-4AF9-9A9C-16808A684B20}" type="datetimeFigureOut">
+            <a:fld id="{2B01452E-83BA-4816-98B4-7F90BFDFB752}" type="datetimeFigureOut">
               <a:rPr lang="zh-CN" altLang="en-US" smtClean="0"/>
               <a:t>2026/10/17</a:t>
             </a:fld>
@@ -1821,7 +1821,7 @@
           <p:cNvPr id="8" name="页脚占位符 7">
             <a:extLst>
               <a:ext uri="{FF2B5EF4-FFF2-40B4-BE49-F238E27FC236}">
-                <a16:creationId xmlns:a16="http://schemas.microsoft.com/office/drawing/2014/main" id="{D78E3742-E158-2075-8FC4-006A92F70071}"/>
+                <a16:creationId xmlns:a16="http://schemas.microsoft.com/office/drawing/2014/main" id="{393BF6CB-55BC-F898-8AC1-4C6D3ED33336}"/>
               </a:ext>
             </a:extLst>
           </p:cNvPr>
@@ -1846,7 +1846,7 @@
           <p:cNvPr id="9" name="灯片编号占位符 8">
             <a:extLst>
               <a:ext uri="{FF2B5EF4-FFF2-40B4-BE49-F238E27FC236}">
-                <a16:creationId xmlns:a16="http://schemas.microsoft.com/office/drawing/2014/main" id="{ACCCFD78-D04D-EA0F-8B10-5AA1E6135DBF}"/>
+                <a16:creationId xmlns:a16="http://schemas.microsoft.com/office/drawing/2014/main" id="{9DD77DE8-14A1-652A-801E-C52E48D826CD}"/>
               </a:ext>
             </a:extLst>
           </p:cNvPr>
@@ -1862,7 +1862,7 @@
           <a:bodyPr/>
           <a:lstStyle/>
           <a:p>
-            <a:fld id="{1717AF0A-DFD1-4466-9FEF-6F1D9B97B9BC}" type="slidenum">
+            <a:fld id="{8F723D4E-C5B0-4F6F-A012-F7303B3A5CF2}" type="slidenum">
               <a:rPr lang="zh-CN" altLang="en-US" smtClean="0"/>
               <a:t>‹#›</a:t>
             </a:fld>
@@ -1873,7 +1873,7 @@
     </p:spTree>
     <p:extLst>
       <p:ext uri="{BB962C8B-B14F-4D97-AF65-F5344CB8AC3E}">
-        <p14:creationId xmlns:p14="http://schemas.microsoft.com/office/powerpoint/2010/main" val="256844969"/>
+        <p14:creationId xmlns:p14="http://schemas.microsoft.com/office/powerpoint/2010/main" val="1049978396"/>
       </p:ext>
     </p:extLst>
   </p:cSld>
@@ -1905,7 +1905,7 @@
           <p:cNvPr id="2" name="标题 1">
             <a:extLst>
               <a:ext uri="{FF2B5EF4-FFF2-40B4-BE49-F238E27FC236}">
-                <a16:creationId xmlns:a16="http://schemas.microsoft.com/office/drawing/2014/main" id="{C7EF5958-365B-3C91-3694-564529E2C987}"/>
+                <a16:creationId xmlns:a16="http://schemas.microsoft.com/office/drawing/2014/main" id="{4A549EDD-5BBD-F051-CD34-FB58DB7F0D56}"/>
               </a:ext>
             </a:extLst>
           </p:cNvPr>
@@ -1933,7 +1933,7 @@
           <p:cNvPr id="3" name="日期占位符 2">
             <a:extLst>
               <a:ext uri="{FF2B5EF4-FFF2-40B4-BE49-F238E27FC236}">
-                <a16:creationId xmlns:a16="http://schemas.microsoft.com/office/drawing/2014/main" id="{54396AF2-FD4A-06BB-E305-9E392042785B}"/>
+                <a16:creationId xmlns:a16="http://schemas.microsoft.com/office/drawing/2014/main" id="{CCCB7D63-2445-CFD2-4683-1163D8F46180}"/>
               </a:ext>
             </a:extLst>
           </p:cNvPr>
@@ -1949,7 +1949,7 @@
           <a:bodyPr/>
           <a:lstStyle/>
           <a:p>
-            <a:fld id="{EE768BC6-7C59-4AF9-9A9C-16808A684B20}" type="datetimeFigureOut">
+            <a:fld id="{2B01452E-83BA-4816-98B4-7F90BFDFB752}" type="datetimeFigureOut">
               <a:rPr lang="zh-CN" altLang="en-US" smtClean="0"/>
               <a:t>2026/10/17</a:t>
             </a:fld>
@@ -1962,7 +1962,7 @@
           <p:cNvPr id="4" name="页脚占位符 3">
             <a:extLst>
               <a:ext uri="{FF2B5EF4-FFF2-40B4-BE49-F238E27FC236}">
-                <a16:creationId xmlns:a16="http://schemas.microsoft.com/office/drawing/2014/main" id="{6E8AA431-D10C-4E93-47AC-E835971B61F5}"/>
+                <a16:creationId xmlns:a16="http://schemas.microsoft.com/office/drawing/2014/main" id="{E599A25C-3E4F-E571-2809-3C886BFF1D8C}"/>
               </a:ext>
             </a:extLst>
           </p:cNvPr>
@@ -1987,7 +1987,7 @@
           <p:cNvPr id="5" name="灯片编号占位符 4">
             <a:extLst>
               <a:ext uri="{FF2B5EF4-FFF2-40B4-BE49-F238E27FC236}">
-                <a16:creationId xmlns:a16="http://schemas.microsoft.com/office/drawing/2014/main" id="{E242EF02-EFEB-A9F9-8FF8-DBA180C197D6}"/>
+                <a16:creationId xmlns:a16="http://schemas.microsoft.com/office/drawing/2014/main" id="{61F7EFB0-92EC-A5AB-249F-07897DB0DD89}"/>
               </a:ext>
             </a:extLst>
           </p:cNvPr>
@@ -2003,7 +2003,7 @@
           <a:bodyPr/>
           <a:lstStyle/>
           <a:p>
-            <a:fld id="{1717AF0A-DFD1-4466-9FEF-6F1D9B97B9BC}" type="slidenum">
+            <a:fld id="{8F723D4E-C5B0-4F6F-A012-F7303B3A5CF2}" type="slidenum">
               <a:rPr lang="zh-CN" altLang="en-US" smtClean="0"/>
               <a:t>‹#›</a:t>
             </a:fld>
@@ -2014,7 +2014,7 @@
     </p:spTree>
     <p:extLst>
       <p:ext uri="{BB962C8B-B14F-4D97-AF65-F5344CB8AC3E}">
-        <p14:creationId xmlns:p14="http://schemas.microsoft.com/office/powerpoint/2010/main" val="3789400244"/>
+        <p14:creationId xmlns:p14="http://schemas.microsoft.com/office/powerpoint/2010/main" val="3321871115"/>
       </p:ext>
     </p:extLst>
   </p:cSld>
@@ -2046,7 +2046,7 @@
           <p:cNvPr id="2" name="日期占位符 1">
             <a:extLst>
               <a:ext uri="{FF2B5EF4-FFF2-40B4-BE49-F238E27FC236}">
-                <a16:creationId xmlns:a16="http://schemas.microsoft.com/office/drawing/2014/main" id="{957A824F-4717-E828-1033-00FA88AAD900}"/>
+                <a16:creationId xmlns:a16="http://schemas.microsoft.com/office/drawing/2014/main" id="{8E62B39C-F2C4-4C31-3009-1D356D8BD020}"/>
               </a:ext>
             </a:extLst>
           </p:cNvPr>
@@ -2062,7 +2062,7 @@
           <a:bodyPr/>
           <a:lstStyle/>
           <a:p>
-            <a:fld id="{EE768BC6-7C59-4AF9-9A9C-16808A684B20}" type="datetimeFigureOut">
+            <a:fld id="{2B01452E-83BA-4816-98B4-7F90BFDFB752}" type="datetimeFigureOut">
               <a:rPr lang="zh-CN" altLang="en-US" smtClean="0"/>
               <a:t>2026/10/17</a:t>
             </a:fld>
@@ -2075,7 +2075,7 @@
           <p:cNvPr id="3" name="页脚占位符 2">
             <a:extLst>
               <a:ext uri="{FF2B5EF4-FFF2-40B4-BE49-F238E27FC236}">
-                <a16:creationId xmlns:a16="http://schemas.microsoft.com/office/drawing/2014/main" id="{5EB642BE-E289-21AB-81AE-9BCD7AB9AAC1}"/>
+                <a16:creationId xmlns:a16="http://schemas.microsoft.com/office/drawing/2014/main" id="{E27207BD-5D6D-D1E9-3588-2D8E40DE3F60}"/>
               </a:ext>
             </a:extLst>
           </p:cNvPr>
@@ -2100,7 +2100,7 @@
           <p:cNvPr id="4" name="灯片编号占位符 3">
             <a:extLst>
               <a:ext uri="{FF2B5EF4-FFF2-40B4-BE49-F238E27FC236}">
-                <a16:creationId xmlns:a16="http://schemas.microsoft.com/office/drawing/2014/main" id="{E28DD62D-266E-71FA-0B24-41F6260EB8EE}"/>
+                <a16:creationId xmlns:a16="http://schemas.microsoft.com/office/drawing/2014/main" id="{EF16BDFC-24BE-7C41-F990-838EF25F30B6}"/>
               </a:ext>
             </a:extLst>
           </p:cNvPr>
@@ -2116,7 +2116,7 @@
           <a:bodyPr/>
           <a:lstStyle/>
           <a:p>
-            <a:fld id="{1717AF0A-DFD1-4466-9FEF-6F1D9B97B9BC}" type="slidenum">
+            <a:fld id="{8F723D4E-C5B0-4F6F-A012-F7303B3A5CF2}" type="slidenum">
               <a:rPr lang="zh-CN" altLang="en-US" smtClean="0"/>
               <a:t>‹#›</a:t>
             </a:fld>
@@ -2127,7 +2127,7 @@
     </p:spTree>
     <p:extLst>
       <p:ext uri="{BB962C8B-B14F-4D97-AF65-F5344CB8AC3E}">
-        <p14:creationId xmlns:p14="http://schemas.microsoft.com/office/powerpoint/2010/main" val="2799194729"/>
+        <p14:creationId xmlns:p14="http://schemas.microsoft.com/office/powerpoint/2010/main" val="2576646751"/>
       </p:ext>
     </p:extLst>
   </p:cSld>
@@ -2159,7 +2159,7 @@
           <p:cNvPr id="2" name="标题 1">
             <a:extLst>
               <a:ext uri="{FF2B5EF4-FFF2-40B4-BE49-F238E27FC236}">
-                <a16:creationId xmlns:a16="http://schemas.microsoft.com/office/drawing/2014/main" id="{5AA12334-4A62-3E66-7D1B-DF572B098C2B}"/>
+                <a16:creationId xmlns:a16="http://schemas.microsoft.com/office/drawing/2014/main" id="{3E44F4F0-14F1-43F3-EE0E-60C3FD680904}"/>
               </a:ext>
             </a:extLst>
           </p:cNvPr>
@@ -2196,7 +2196,7 @@
           <p:cNvPr id="3" name="内容占位符 2">
             <a:extLst>
               <a:ext uri="{FF2B5EF4-FFF2-40B4-BE49-F238E27FC236}">
-                <a16:creationId xmlns:a16="http://schemas.microsoft.com/office/drawing/2014/main" id="{B6D28C76-1857-05C0-4C80-87ADFDF69858}"/>
+                <a16:creationId xmlns:a16="http://schemas.microsoft.com/office/drawing/2014/main" id="{55259200-5A36-0F7F-FA7B-DED0C6D8B370}"/>
               </a:ext>
             </a:extLst>
           </p:cNvPr>
@@ -2286,7 +2286,7 @@
           <p:cNvPr id="4" name="文本占位符 3">
             <a:extLst>
               <a:ext uri="{FF2B5EF4-FFF2-40B4-BE49-F238E27FC236}">
-                <a16:creationId xmlns:a16="http://schemas.microsoft.com/office/drawing/2014/main" id="{93F28C32-561C-3BAB-53EE-DC2400A39ADE}"/>
+                <a16:creationId xmlns:a16="http://schemas.microsoft.com/office/drawing/2014/main" id="{8EA8E9E2-7E4D-AF4A-0627-DCC33A2F3A40}"/>
               </a:ext>
             </a:extLst>
           </p:cNvPr>
@@ -2357,7 +2357,7 @@
           <p:cNvPr id="5" name="日期占位符 4">
             <a:extLst>
               <a:ext uri="{FF2B5EF4-FFF2-40B4-BE49-F238E27FC236}">
-                <a16:creationId xmlns:a16="http://schemas.microsoft.com/office/drawing/2014/main" id="{54B0DE82-C7B2-4F1D-4FB5-053E1D75691B}"/>
+                <a16:creationId xmlns:a16="http://schemas.microsoft.com/office/drawing/2014/main" id="{73BA4C50-BCDF-B593-DEE0-0B42C8E56E1D}"/>
               </a:ext>
             </a:extLst>
           </p:cNvPr>
@@ -2373,7 +2373,7 @@
           <a:bodyPr/>
           <a:lstStyle/>
           <a:p>
-            <a:fld id="{EE768BC6-7C59-4AF9-9A9C-16808A684B20}" type="datetimeFigureOut">
+            <a:fld id="{2B01452E-83BA-4816-98B4-7F90BFDFB752}" type="datetimeFigureOut">
               <a:rPr lang="zh-CN" altLang="en-US" smtClean="0"/>
               <a:t>2026/10/17</a:t>
             </a:fld>
@@ -2386,7 +2386,7 @@
           <p:cNvPr id="6" name="页脚占位符 5">
             <a:extLst>
               <a:ext uri="{FF2B5EF4-FFF2-40B4-BE49-F238E27FC236}">
-                <a16:creationId xmlns:a16="http://schemas.microsoft.com/office/drawing/2014/main" id="{21CDAE68-D52E-113D-34F1-C205C4158B2A}"/>
+                <a16:creationId xmlns:a16="http://schemas.microsoft.com/office/drawing/2014/main" id="{46F67204-2CE9-9F97-063A-60EC18F50FC5}"/>
               </a:ext>
             </a:extLst>
           </p:cNvPr>
@@ -2411,7 +2411,7 @@
           <p:cNvPr id="7" name="灯片编号占位符 6">
             <a:extLst>
               <a:ext uri="{FF2B5EF4-FFF2-40B4-BE49-F238E27FC236}">
-                <a16:creationId xmlns:a16="http://schemas.microsoft.com/office/drawing/2014/main" id="{60D0907E-0476-C3C6-0A45-EF53D495F8E4}"/>
+                <a16:creationId xmlns:a16="http://schemas.microsoft.com/office/drawing/2014/main" id="{20D73C6A-F89B-3FDC-5B98-79D23D32750D}"/>
               </a:ext>
             </a:extLst>
           </p:cNvPr>
@@ -2427,7 +2427,7 @@
           <a:bodyPr/>
           <a:lstStyle/>
           <a:p>
-            <a:fld id="{1717AF0A-DFD1-4466-9FEF-6F1D9B97B9BC}" type="slidenum">
+            <a:fld id="{8F723D4E-C5B0-4F6F-A012-F7303B3A5CF2}" type="slidenum">
               <a:rPr lang="zh-CN" altLang="en-US" smtClean="0"/>
               <a:t>‹#›</a:t>
             </a:fld>
@@ -2438,7 +2438,7 @@
     </p:spTree>
     <p:extLst>
       <p:ext uri="{BB962C8B-B14F-4D97-AF65-F5344CB8AC3E}">
-        <p14:creationId xmlns:p14="http://schemas.microsoft.com/office/powerpoint/2010/main" val="1121228563"/>
+        <p14:creationId xmlns:p14="http://schemas.microsoft.com/office/powerpoint/2010/main" val="2512640851"/>
       </p:ext>
     </p:extLst>
   </p:cSld>
@@ -2470,7 +2470,7 @@
           <p:cNvPr id="2" name="标题 1">
             <a:extLst>
               <a:ext uri="{FF2B5EF4-FFF2-40B4-BE49-F238E27FC236}">
-                <a16:creationId xmlns:a16="http://schemas.microsoft.com/office/drawing/2014/main" id="{D72127A3-CE9A-4EC3-6E6B-77CD5D3EC8AE}"/>
+                <a16:creationId xmlns:a16="http://schemas.microsoft.com/office/drawing/2014/main" id="{5E708FC3-6747-A592-8B0F-A744D34FD888}"/>
               </a:ext>
             </a:extLst>
           </p:cNvPr>
@@ -2507,7 +2507,7 @@
           <p:cNvPr id="3" name="图片占位符 2">
             <a:extLst>
               <a:ext uri="{FF2B5EF4-FFF2-40B4-BE49-F238E27FC236}">
-                <a16:creationId xmlns:a16="http://schemas.microsoft.com/office/drawing/2014/main" id="{CA32BB07-7441-54C3-41A1-2BA0C617A094}"/>
+                <a16:creationId xmlns:a16="http://schemas.microsoft.com/office/drawing/2014/main" id="{85C88848-2B81-DCD3-81A4-4E7DFE465D9A}"/>
               </a:ext>
             </a:extLst>
           </p:cNvPr>
@@ -2574,7 +2574,7 @@
           <p:cNvPr id="4" name="文本占位符 3">
             <a:extLst>
               <a:ext uri="{FF2B5EF4-FFF2-40B4-BE49-F238E27FC236}">
-                <a16:creationId xmlns:a16="http://schemas.microsoft.com/office/drawing/2014/main" id="{19FF0BB8-D83E-986C-C1EC-A7A40903F5BA}"/>
+                <a16:creationId xmlns:a16="http://schemas.microsoft.com/office/drawing/2014/main" id="{5F3C114E-25E5-76CA-486F-4F08A32B90FD}"/>
               </a:ext>
             </a:extLst>
           </p:cNvPr>
@@ -2645,7 +2645,7 @@
           <p:cNvPr id="5" name="日期占位符 4">
             <a:extLst>
               <a:ext uri="{FF2B5EF4-FFF2-40B4-BE49-F238E27FC236}">
-                <a16:creationId xmlns:a16="http://schemas.microsoft.com/office/drawing/2014/main" id="{972439BE-BA6E-C01B-3821-6857FC1F3DBD}"/>
+                <a16:creationId xmlns:a16="http://schemas.microsoft.com/office/drawing/2014/main" id="{C29129CB-021F-50AD-AD64-3C2CD10060FD}"/>
               </a:ext>
             </a:extLst>
           </p:cNvPr>
@@ -2661,7 +2661,7 @@
           <a:bodyPr/>
           <a:lstStyle/>
           <a:p>
-            <a:fld id="{EE768BC6-7C59-4AF9-9A9C-16808A684B20}" type="datetimeFigureOut">
+            <a:fld id="{2B01452E-83BA-4816-98B4-7F90BFDFB752}" type="datetimeFigureOut">
               <a:rPr lang="zh-CN" altLang="en-US" smtClean="0"/>
               <a:t>2026/10/17</a:t>
             </a:fld>
@@ -2674,7 +2674,7 @@
           <p:cNvPr id="6" name="页脚占位符 5">
             <a:extLst>
               <a:ext uri="{FF2B5EF4-FFF2-40B4-BE49-F238E27FC236}">
-                <a16:creationId xmlns:a16="http://schemas.microsoft.com/office/drawing/2014/main" id="{2CD9EF04-D520-F8A2-4849-96E39F7A9FAA}"/>
+                <a16:creationId xmlns:a16="http://schemas.microsoft.com/office/drawing/2014/main" id="{37A8350D-7101-B3C0-8BC1-40A05F4437F0}"/>
               </a:ext>
             </a:extLst>
           </p:cNvPr>
@@ -2699,7 +2699,7 @@
           <p:cNvPr id="7" name="灯片编号占位符 6">
             <a:extLst>
               <a:ext uri="{FF2B5EF4-FFF2-40B4-BE49-F238E27FC236}">
-                <a16:creationId xmlns:a16="http://schemas.microsoft.com/office/drawing/2014/main" id="{21C87766-FB93-0A20-9033-AD16DD5EBA7E}"/>
+                <a16:creationId xmlns:a16="http://schemas.microsoft.com/office/drawing/2014/main" id="{2559BCC7-F7EF-1787-6288-D66268E8FAFC}"/>
               </a:ext>
             </a:extLst>
           </p:cNvPr>
@@ -2715,7 +2715,7 @@
           <a:bodyPr/>
           <a:lstStyle/>
           <a:p>
-            <a:fld id="{1717AF0A-DFD1-4466-9FEF-6F1D9B97B9BC}" type="slidenum">
+            <a:fld id="{8F723D4E-C5B0-4F6F-A012-F7303B3A5CF2}" type="slidenum">
               <a:rPr lang="zh-CN" altLang="en-US" smtClean="0"/>
               <a:t>‹#›</a:t>
             </a:fld>
@@ -2726,7 +2726,7 @@
     </p:spTree>
     <p:extLst>
       <p:ext uri="{BB962C8B-B14F-4D97-AF65-F5344CB8AC3E}">
-        <p14:creationId xmlns:p14="http://schemas.microsoft.com/office/powerpoint/2010/main" val="1017158632"/>
+        <p14:creationId xmlns:p14="http://schemas.microsoft.com/office/powerpoint/2010/main" val="2736833065"/>
       </p:ext>
     </p:extLst>
   </p:cSld>
@@ -2763,7 +2763,7 @@
           <p:cNvPr id="2" name="标题占位符 1">
             <a:extLst>
               <a:ext uri="{FF2B5EF4-FFF2-40B4-BE49-F238E27FC236}">
-                <a16:creationId xmlns:a16="http://schemas.microsoft.com/office/drawing/2014/main" id="{5C29D395-CEC1-64E8-88D9-B73FA66693A3}"/>
+                <a16:creationId xmlns:a16="http://schemas.microsoft.com/office/drawing/2014/main" id="{D9370843-09AA-DB43-5B39-50FB4BA865C9}"/>
               </a:ext>
             </a:extLst>
           </p:cNvPr>
@@ -2801,7 +2801,7 @@
           <p:cNvPr id="3" name="文本占位符 2">
             <a:extLst>
               <a:ext uri="{FF2B5EF4-FFF2-40B4-BE49-F238E27FC236}">
-                <a16:creationId xmlns:a16="http://schemas.microsoft.com/office/drawing/2014/main" id="{F923C326-661E-D1AB-2407-F565F8980BE3}"/>
+                <a16:creationId xmlns:a16="http://schemas.microsoft.com/office/drawing/2014/main" id="{146930C6-E6DA-CDB8-5CA5-69C4D32E3FCF}"/>
               </a:ext>
             </a:extLst>
           </p:cNvPr>
@@ -2868,7 +2868,7 @@
           <p:cNvPr id="4" name="日期占位符 3">
             <a:extLst>
               <a:ext uri="{FF2B5EF4-FFF2-40B4-BE49-F238E27FC236}">
-                <a16:creationId xmlns:a16="http://schemas.microsoft.com/office/drawing/2014/main" id="{1AB53605-940F-37CD-681D-ADDDE581A75B}"/>
+                <a16:creationId xmlns:a16="http://schemas.microsoft.com/office/drawing/2014/main" id="{9CBCFBF0-75BC-F3C5-C2BD-D94403F9ED23}"/>
               </a:ext>
             </a:extLst>
           </p:cNvPr>
@@ -2902,7 +2902,7 @@
             </a:lvl1pPr>
           </a:lstStyle>
           <a:p>
-            <a:fld id="{EE768BC6-7C59-4AF9-9A9C-16808A684B20}" type="datetimeFigureOut">
+            <a:fld id="{2B01452E-83BA-4816-98B4-7F90BFDFB752}" type="datetimeFigureOut">
               <a:rPr lang="zh-CN" altLang="en-US" smtClean="0"/>
               <a:t>2026/10/17</a:t>
             </a:fld>
@@ -2915,7 +2915,7 @@
           <p:cNvPr id="5" name="页脚占位符 4">
             <a:extLst>
               <a:ext uri="{FF2B5EF4-FFF2-40B4-BE49-F238E27FC236}">
-                <a16:creationId xmlns:a16="http://schemas.microsoft.com/office/drawing/2014/main" id="{EC0265B1-A4B1-130D-23A1-F1D3BFC64825}"/>
+                <a16:creationId xmlns:a16="http://schemas.microsoft.com/office/drawing/2014/main" id="{6B5B0D5D-F3BE-EB50-C197-70ABA90ABD20}"/>
               </a:ext>
             </a:extLst>
           </p:cNvPr>
@@ -2958,7 +2958,7 @@
           <p:cNvPr id="6" name="灯片编号占位符 5">
             <a:extLst>
               <a:ext uri="{FF2B5EF4-FFF2-40B4-BE49-F238E27FC236}">
-                <a16:creationId xmlns:a16="http://schemas.microsoft.com/office/drawing/2014/main" id="{EC1A6588-17CE-37F9-B85E-4C685B434430}"/>
+                <a16:creationId xmlns:a16="http://schemas.microsoft.com/office/drawing/2014/main" id="{9FD3B146-1D8E-8AD8-C3CE-7A69B2B3AC2C}"/>
               </a:ext>
             </a:extLst>
           </p:cNvPr>
@@ -2992,7 +2992,7 @@
             </a:lvl1pPr>
           </a:lstStyle>
           <a:p>
-            <a:fld id="{1717AF0A-DFD1-4466-9FEF-6F1D9B97B9BC}" type="slidenum">
+            <a:fld id="{8F723D4E-C5B0-4F6F-A012-F7303B3A5CF2}" type="slidenum">
               <a:rPr lang="zh-CN" altLang="en-US" smtClean="0"/>
               <a:t>‹#›</a:t>
             </a:fld>
@@ -3003,7 +3003,7 @@
     </p:spTree>
     <p:extLst>
       <p:ext uri="{BB962C8B-B14F-4D97-AF65-F5344CB8AC3E}">
-        <p14:creationId xmlns:p14="http://schemas.microsoft.com/office/powerpoint/2010/main" val="3815865975"/>
+        <p14:creationId xmlns:p14="http://schemas.microsoft.com/office/powerpoint/2010/main" val="1887363914"/>
       </p:ext>
     </p:extLst>
   </p:cSld>
@@ -3326,7 +3326,7 @@
           <p:cNvPr id="2" name="文本框 1">
             <a:extLst>
               <a:ext uri="{FF2B5EF4-FFF2-40B4-BE49-F238E27FC236}">
-                <a16:creationId xmlns:a16="http://schemas.microsoft.com/office/drawing/2014/main" id="{5F5B9E23-259A-BC2E-78D2-59A7DD6644BF}"/>
+                <a16:creationId xmlns:a16="http://schemas.microsoft.com/office/drawing/2014/main" id="{0FD5AE9E-1667-5BC8-1BC9-C831D28875FE}"/>
               </a:ext>
             </a:extLst>
           </p:cNvPr>
@@ -3369,7 +3369,7 @@
           <p:cNvPr id="3" name="文本框 2">
             <a:extLst>
               <a:ext uri="{FF2B5EF4-FFF2-40B4-BE49-F238E27FC236}">
-                <a16:creationId xmlns:a16="http://schemas.microsoft.com/office/drawing/2014/main" id="{311729D7-2479-0AF1-FE22-DE5594828E6B}"/>
+                <a16:creationId xmlns:a16="http://schemas.microsoft.com/office/drawing/2014/main" id="{2EC34C81-1364-9991-6A69-E45AA5EDB422}"/>
               </a:ext>
             </a:extLst>
           </p:cNvPr>
@@ -3412,7 +3412,7 @@
           <p:cNvPr id="4" name="文本框 3">
             <a:extLst>
               <a:ext uri="{FF2B5EF4-FFF2-40B4-BE49-F238E27FC236}">
-                <a16:creationId xmlns:a16="http://schemas.microsoft.com/office/drawing/2014/main" id="{ED3A769D-C9BC-FA2E-5937-666FFDD96EF9}"/>
+                <a16:creationId xmlns:a16="http://schemas.microsoft.com/office/drawing/2014/main" id="{BB0964AB-89D9-124B-BE5E-0D96149C9A1E}"/>
               </a:ext>
             </a:extLst>
           </p:cNvPr>
@@ -3455,7 +3455,7 @@
           <p:cNvPr id="5" name="文本框 4">
             <a:extLst>
               <a:ext uri="{FF2B5EF4-FFF2-40B4-BE49-F238E27FC236}">
-                <a16:creationId xmlns:a16="http://schemas.microsoft.com/office/drawing/2014/main" id="{25159AB8-15E1-A7D2-CD45-BAE0D6EBCD29}"/>
+                <a16:creationId xmlns:a16="http://schemas.microsoft.com/office/drawing/2014/main" id="{AE5DDDD7-7DB4-5212-262B-B47AC14AC877}"/>
               </a:ext>
             </a:extLst>
           </p:cNvPr>
@@ -3498,7 +3498,7 @@
           <p:cNvPr id="6" name="文本框 5">
             <a:extLst>
               <a:ext uri="{FF2B5EF4-FFF2-40B4-BE49-F238E27FC236}">
-                <a16:creationId xmlns:a16="http://schemas.microsoft.com/office/drawing/2014/main" id="{D6B16B00-39A7-D245-FFD7-08F098498563}"/>
+                <a16:creationId xmlns:a16="http://schemas.microsoft.com/office/drawing/2014/main" id="{BB2212C8-E547-4FB6-0445-CE228984DB07}"/>
               </a:ext>
             </a:extLst>
           </p:cNvPr>
@@ -3541,7 +3541,7 @@
           <p:cNvPr id="7" name="文本框 6">
             <a:extLst>
               <a:ext uri="{FF2B5EF4-FFF2-40B4-BE49-F238E27FC236}">
-                <a16:creationId xmlns:a16="http://schemas.microsoft.com/office/drawing/2014/main" id="{02DA60EB-D9B6-5F38-5AB9-A5610144F6FC}"/>
+                <a16:creationId xmlns:a16="http://schemas.microsoft.com/office/drawing/2014/main" id="{CAC1AD8C-4B25-1EB6-40EE-46C80D04D7EF}"/>
               </a:ext>
             </a:extLst>
           </p:cNvPr>
@@ -3584,7 +3584,7 @@
           <p:cNvPr id="8" name="文本框 7">
             <a:extLst>
               <a:ext uri="{FF2B5EF4-FFF2-40B4-BE49-F238E27FC236}">
-                <a16:creationId xmlns:a16="http://schemas.microsoft.com/office/drawing/2014/main" id="{F8CB7BF9-EB97-BBCF-322C-424BCC2F823A}"/>
+                <a16:creationId xmlns:a16="http://schemas.microsoft.com/office/drawing/2014/main" id="{048B2A10-5745-3EC9-306D-AFFBDCD5F233}"/>
               </a:ext>
             </a:extLst>
           </p:cNvPr>
@@ -3626,10 +3626,53 @@
           </a:p>
         </p:txBody>
       </p:sp>
+      <p:sp>
+        <p:nvSpPr>
+          <p:cNvPr id="9" name="文本框 8">
+            <a:extLst>
+              <a:ext uri="{FF2B5EF4-FFF2-40B4-BE49-F238E27FC236}">
+                <a16:creationId xmlns:a16="http://schemas.microsoft.com/office/drawing/2014/main" id="{9B15E9F0-70C8-8F34-029E-F679A1DAF36C}"/>
+              </a:ext>
+            </a:extLst>
+          </p:cNvPr>
+          <p:cNvSpPr txBox="1"/>
+          <p:nvPr/>
+        </p:nvSpPr>
+        <p:spPr>
+          <a:xfrm>
+            <a:off x="6223000" y="3997960"/>
+            <a:ext cx="4996180" cy="369332"/>
+          </a:xfrm>
+          <a:prstGeom prst="rect">
+            <a:avLst/>
+          </a:prstGeom>
+          <a:noFill/>
+          <a:ln>
+            <a:solidFill>
+              <a:srgbClr val="C8C8C8"/>
+            </a:solidFill>
+          </a:ln>
+        </p:spPr>
+        <p:txBody>
+          <a:bodyPr vert="horz" wrap="square" rtlCol="0">
+            <a:noAutofit/>
+          </a:bodyPr>
+          <a:lstStyle/>
+          <a:p>
+            <a:r>
+              <a:rPr lang="zh-CN" altLang="en-US" sz="2700" b="1">
+                <a:latin typeface="华文细黑" panose="02010600040101010101" pitchFamily="2" charset="-122"/>
+                <a:ea typeface="华文细黑" panose="02010600040101010101" pitchFamily="2" charset="-122"/>
+              </a:rPr>
+              <a:t>一二三四五六七八九十一二三四五六七</a:t>
+            </a:r>
+          </a:p>
+        </p:txBody>
+      </p:sp>
     </p:spTree>
     <p:extLst>
       <p:ext uri="{BB962C8B-B14F-4D97-AF65-F5344CB8AC3E}">
-        <p14:creationId xmlns:p14="http://schemas.microsoft.com/office/powerpoint/2010/main" val="1586458889"/>
+        <p14:creationId xmlns:p14="http://schemas.microsoft.com/office/powerpoint/2010/main" val="474812793"/>
       </p:ext>
     </p:extLst>
   </p:cSld>
